--- a/資料書.pptx
+++ b/資料書.pptx
@@ -202,7 +202,7 @@
           <a:p>
             <a:fld id="{2EFD0E49-C193-4C2B-8B4C-53762FE16E91}" type="datetimeFigureOut">
               <a:rPr kumimoji="1" lang="ja-JP" altLang="en-US" smtClean="0"/>
-              <a:t>2026/1/28</a:t>
+              <a:t>2026/5/13</a:t>
             </a:fld>
             <a:endParaRPr kumimoji="1" lang="ja-JP" altLang="en-US"/>
           </a:p>
@@ -1047,7 +1047,7 @@
           <a:p>
             <a:fld id="{28E435B7-E62C-44EE-A4AD-7C3BB417768E}" type="datetimeFigureOut">
               <a:rPr kumimoji="1" lang="ja-JP" altLang="en-US" smtClean="0"/>
-              <a:t>2026/1/28</a:t>
+              <a:t>2026/5/13</a:t>
             </a:fld>
             <a:endParaRPr kumimoji="1" lang="ja-JP" altLang="en-US"/>
           </a:p>
@@ -1281,7 +1281,7 @@
           <a:p>
             <a:fld id="{28E435B7-E62C-44EE-A4AD-7C3BB417768E}" type="datetimeFigureOut">
               <a:rPr kumimoji="1" lang="ja-JP" altLang="en-US" smtClean="0"/>
-              <a:t>2026/1/28</a:t>
+              <a:t>2026/5/13</a:t>
             </a:fld>
             <a:endParaRPr kumimoji="1" lang="ja-JP" altLang="en-US"/>
           </a:p>
@@ -1493,7 +1493,7 @@
           <a:p>
             <a:fld id="{28E435B7-E62C-44EE-A4AD-7C3BB417768E}" type="datetimeFigureOut">
               <a:rPr kumimoji="1" lang="ja-JP" altLang="en-US" smtClean="0"/>
-              <a:t>2026/1/28</a:t>
+              <a:t>2026/5/13</a:t>
             </a:fld>
             <a:endParaRPr kumimoji="1" lang="ja-JP" altLang="en-US"/>
           </a:p>
@@ -1695,7 +1695,7 @@
           <a:p>
             <a:fld id="{28E435B7-E62C-44EE-A4AD-7C3BB417768E}" type="datetimeFigureOut">
               <a:rPr kumimoji="1" lang="ja-JP" altLang="en-US" smtClean="0"/>
-              <a:t>2026/1/28</a:t>
+              <a:t>2026/5/13</a:t>
             </a:fld>
             <a:endParaRPr kumimoji="1" lang="ja-JP" altLang="en-US"/>
           </a:p>
@@ -2266,7 +2266,7 @@
           <a:p>
             <a:fld id="{28E435B7-E62C-44EE-A4AD-7C3BB417768E}" type="datetimeFigureOut">
               <a:rPr kumimoji="1" lang="ja-JP" altLang="en-US" smtClean="0"/>
-              <a:t>2026/1/28</a:t>
+              <a:t>2026/5/13</a:t>
             </a:fld>
             <a:endParaRPr kumimoji="1" lang="ja-JP" altLang="en-US"/>
           </a:p>
@@ -2632,7 +2632,7 @@
           <a:p>
             <a:fld id="{28E435B7-E62C-44EE-A4AD-7C3BB417768E}" type="datetimeFigureOut">
               <a:rPr kumimoji="1" lang="ja-JP" altLang="en-US" smtClean="0"/>
-              <a:t>2026/1/28</a:t>
+              <a:t>2026/5/13</a:t>
             </a:fld>
             <a:endParaRPr kumimoji="1" lang="ja-JP" altLang="en-US"/>
           </a:p>
@@ -3133,7 +3133,7 @@
           <a:p>
             <a:fld id="{28E435B7-E62C-44EE-A4AD-7C3BB417768E}" type="datetimeFigureOut">
               <a:rPr kumimoji="1" lang="ja-JP" altLang="en-US" smtClean="0"/>
-              <a:t>2026/1/28</a:t>
+              <a:t>2026/5/13</a:t>
             </a:fld>
             <a:endParaRPr kumimoji="1" lang="ja-JP" altLang="en-US"/>
           </a:p>
@@ -3251,7 +3251,7 @@
           <a:p>
             <a:fld id="{28E435B7-E62C-44EE-A4AD-7C3BB417768E}" type="datetimeFigureOut">
               <a:rPr kumimoji="1" lang="ja-JP" altLang="en-US" smtClean="0"/>
-              <a:t>2026/1/28</a:t>
+              <a:t>2026/5/13</a:t>
             </a:fld>
             <a:endParaRPr kumimoji="1" lang="ja-JP" altLang="en-US"/>
           </a:p>
@@ -3346,7 +3346,7 @@
           <a:p>
             <a:fld id="{28E435B7-E62C-44EE-A4AD-7C3BB417768E}" type="datetimeFigureOut">
               <a:rPr kumimoji="1" lang="ja-JP" altLang="en-US" smtClean="0"/>
-              <a:t>2026/1/28</a:t>
+              <a:t>2026/5/13</a:t>
             </a:fld>
             <a:endParaRPr kumimoji="1" lang="ja-JP" altLang="en-US"/>
           </a:p>
@@ -3760,7 +3760,7 @@
           <a:p>
             <a:fld id="{28E435B7-E62C-44EE-A4AD-7C3BB417768E}" type="datetimeFigureOut">
               <a:rPr kumimoji="1" lang="ja-JP" altLang="en-US" smtClean="0"/>
-              <a:t>2026/1/28</a:t>
+              <a:t>2026/5/13</a:t>
             </a:fld>
             <a:endParaRPr kumimoji="1" lang="ja-JP" altLang="en-US"/>
           </a:p>
@@ -4154,7 +4154,7 @@
           <a:p>
             <a:fld id="{28E435B7-E62C-44EE-A4AD-7C3BB417768E}" type="datetimeFigureOut">
               <a:rPr kumimoji="1" lang="ja-JP" altLang="en-US" smtClean="0"/>
-              <a:t>2026/1/28</a:t>
+              <a:t>2026/5/13</a:t>
             </a:fld>
             <a:endParaRPr kumimoji="1" lang="ja-JP" altLang="en-US"/>
           </a:p>
@@ -4499,7 +4499,7 @@
           <a:p>
             <a:fld id="{28E435B7-E62C-44EE-A4AD-7C3BB417768E}" type="datetimeFigureOut">
               <a:rPr kumimoji="1" lang="ja-JP" altLang="en-US" smtClean="0"/>
-              <a:t>2026/1/28</a:t>
+              <a:t>2026/5/13</a:t>
             </a:fld>
             <a:endParaRPr kumimoji="1" lang="ja-JP" altLang="en-US"/>
           </a:p>
@@ -5894,6 +5894,18 @@
               <a:t>重要度が設定できる機能</a:t>
             </a:r>
             <a:endParaRPr lang="en-US" altLang="ja-JP" sz="2800" dirty="0"/>
+          </a:p>
+          <a:p>
+            <a:r>
+              <a:rPr lang="ja-JP" altLang="en-US" sz="2800" dirty="0"/>
+              <a:t>レイアウトなどを変更できる機能</a:t>
+            </a:r>
+          </a:p>
+          <a:p>
+            <a:r>
+              <a:rPr lang="en-US" altLang="ja-JP" sz="2800" dirty="0"/>
+              <a:t>URL   https://qiita.com/shake12/items/5d5e84c323b4560e8e60</a:t>
+            </a:r>
           </a:p>
           <a:p>
             <a:endParaRPr kumimoji="1" lang="ja-JP" altLang="en-US" dirty="0"/>
